--- a/decks/hist-somme/hist-somme_ch1_causes.pptx
+++ b/decks/hist-somme/hist-somme_ch1_causes.pptx
@@ -129,31 +129,31 @@
   <p:extLst>
     <p:ext uri="{521415D9-36F7-43E2-AB2F-B90AF26B5E84}">
       <p14:sectionLst xmlns:p14="http://schemas.microsoft.com/office/powerpoint/2010/main">
-        <p14:section name="Opening" id="{af9dd66e-7e1c-9532-eea3-9aebd0970529}">
+        <p14:section name="Opening" id="{6a9fbc47-c63a-7194-ef94-e631d92784bd}">
           <p14:sldIdLst>
             <p14:sldId id="256"/>
           </p14:sldIdLst>
         </p14:section>
-        <p14:section name="Gate" id="{7c6f8d9e-80db-42ae-2593-29d2287645a6}">
+        <p14:section name="Gate" id="{0d8ac389-fc02-6c4c-e2c0-ed4632c4e950}">
           <p14:sldIdLst>
             <p14:sldId id="257"/>
             <p14:sldId id="258"/>
             <p14:sldId id="259"/>
           </p14:sldIdLst>
         </p14:section>
-        <p14:section name="Pre-teach" id="{ad4cf28a-d762-3070-250f-08517ecb23a1}">
+        <p14:section name="Pre-teach" id="{14bce38d-00f0-2354-0089-ab4352470e31}">
           <p14:sldIdLst>
             <p14:sldId id="260"/>
             <p14:sldId id="261"/>
           </p14:sldIdLst>
         </p14:section>
-        <p14:section name="Read-along" id="{779f4182-aeb2-40dd-e591-58c67df82218}">
+        <p14:section name="Read-along" id="{5864c6c6-1f96-a68f-7c95-d0dd3b6a367c}">
           <p14:sldIdLst>
             <p14:sldId id="262"/>
             <p14:sldId id="263"/>
           </p14:sldIdLst>
         </p14:section>
-        <p14:section name="Teach" id="{5197cc04-0d37-7468-1467-7f9a2ec717b4}">
+        <p14:section name="Teach" id="{d74ce224-f350-b4c8-617b-9a7add5624da}">
           <p14:sldIdLst>
             <p14:sldId id="264"/>
             <p14:sldId id="265"/>
@@ -163,7 +163,7 @@
             <p14:sldId id="269"/>
           </p14:sldIdLst>
         </p14:section>
-        <p14:section name="Routes" id="{a56a63ab-eaf0-0e80-75f7-e0551e8877d5}">
+        <p14:section name="Routes" id="{da12a5f3-1a1c-42d6-aff5-55f6066fab62}">
           <p14:sldIdLst>
             <p14:sldId id="270"/>
             <p14:sldId id="271"/>
@@ -171,12 +171,12 @@
             <p14:sldId id="273"/>
           </p14:sldIdLst>
         </p14:section>
-        <p14:section name="Close" id="{01bd2053-886a-2595-e1ab-95b01c89810d}">
+        <p14:section name="Close" id="{104fa23d-652c-a6ca-e7a5-067b5c40dff4}">
           <p14:sldIdLst>
             <p14:sldId id="274"/>
           </p14:sldIdLst>
         </p14:section>
-        <p14:section name="Answers" id="{8253ff6b-8905-e909-d310-f4585ad05cb0}">
+        <p14:section name="Answers" id="{c84cb6d1-2912-21ae-57a0-7a0088834202}">
           <p14:sldIdLst>
             <p14:sldId id="275"/>
             <p14:sldId id="276"/>
